--- a/deliverables/video-8-slides/out/Video_8_Main_Slides.pptx
+++ b/deliverables/video-8-slides/out/Video_8_Main_Slides.pptx
@@ -617,12 +617,17 @@
           <a:p/>
           <a:p>
             <a:r>
-              <a:t>Say the finding that makes the exercise worth doing: for most people the first</a:t>
-            </a:r>
-          </a:p>
-          <a:p>
-            <a:r>
-              <a:t>column is longer than they feared and the third is shorter than they assumed.</a:t>
+              <a:t>Say the finding that makes the exercise worth doing, as an invitation rather</a:t>
+            </a:r>
+          </a:p>
+          <a:p>
+            <a:r>
+              <a:t>than a statistic: they may find the first column is longer than they feared and</a:t>
+            </a:r>
+          </a:p>
+          <a:p>
+            <a:r>
+              <a:t>the third shorter than they assumed.</a:t>
             </a:r>
           </a:p>
           <a:p/>
@@ -812,17 +817,22 @@
           <a:p/>
           <a:p>
             <a:r>
-              <a:t>Video 9 has not been produced. Point the end-screen card at the Career</a:t>
-            </a:r>
-          </a:p>
-          <a:p>
-            <a:r>
-              <a:t>Portability playlist until it publishes, then switch the card to the video.</a:t>
-            </a:r>
-          </a:p>
-          <a:p>
-            <a:r>
-              <a:t>The playlist line is on the slide either way, so no re-render is needed.</a:t>
+              <a:t>No unpublished video is named here or in the spoken line. Set the end-screen</a:t>
+            </a:r>
+          </a:p>
+          <a:p>
+            <a:r>
+              <a:t>video element at upload: route it directly to the next video if that video is</a:t>
+            </a:r>
+          </a:p>
+          <a:p>
+            <a:r>
+              <a:t>already public, otherwise to the public Career Portability playlist. Verify</a:t>
+            </a:r>
+          </a:p>
+          <a:p>
+            <a:r>
+              <a:t>the playlist opens signed out and contains at least one other public video.</a:t>
             </a:r>
           </a:p>
         </p:txBody>
@@ -5976,7 +5986,7 @@
         </p:nvSpPr>
         <p:spPr>
           <a:xfrm>
-            <a:off x="1016000" y="1587500"/>
+            <a:off x="1016000" y="1701800"/>
             <a:ext cx="5715000" cy="203200"/>
           </a:xfrm>
           <a:prstGeom prst="rect">
@@ -6004,7 +6014,7 @@
                 <a:ea typeface="Montserrat"/>
                 <a:cs typeface="Montserrat"/>
               </a:rPr>
-              <a:t>WATCH NEXT</a:t>
+              <a:t>CONTINUE THE SERIES</a:t>
             </a:r>
           </a:p>
         </p:txBody>
@@ -6017,8 +6027,8 @@
         </p:nvSpPr>
         <p:spPr>
           <a:xfrm>
-            <a:off x="1016000" y="2032000"/>
-            <a:ext cx="5715000" cy="1333500"/>
+            <a:off x="1016000" y="2235200"/>
+            <a:ext cx="5715000" cy="1130300"/>
           </a:xfrm>
           <a:prstGeom prst="rect">
             <a:avLst/>
@@ -6033,11 +6043,11 @@
           <a:p>
             <a:pPr algn="l">
               <a:lnSpc>
-                <a:spcPct val="116000"/>
+                <a:spcPct val="112000"/>
               </a:lnSpc>
             </a:pPr>
             <a:r>
-              <a:rPr sz="2900" b="1" i="0">
+              <a:rPr sz="3800" b="1" i="0">
                 <a:solidFill>
                   <a:srgbClr val="F5F1E8"/>
                 </a:solidFill>
@@ -6045,11 +6055,11 @@
                 <a:ea typeface="Montserrat"/>
                 <a:cs typeface="Montserrat"/>
               </a:rPr>
-              <a:t>WHAT TO DO</a:t>
+              <a:t>CAREER</a:t>
             </a:r>
             <a:br/>
             <a:r>
-              <a:rPr sz="2900" b="1" i="0">
+              <a:rPr sz="3800" b="1" i="0">
                 <a:solidFill>
                   <a:srgbClr val="F5F1E8"/>
                 </a:solidFill>
@@ -6057,19 +6067,7 @@
                 <a:ea typeface="Montserrat"/>
                 <a:cs typeface="Montserrat"/>
               </a:rPr>
-              <a:t>BEFORE A LAYOFF</a:t>
-            </a:r>
-            <a:br/>
-            <a:r>
-              <a:rPr sz="2900" b="1" i="0">
-                <a:solidFill>
-                  <a:srgbClr val="F5F1E8"/>
-                </a:solidFill>
-                <a:latin typeface="Montserrat"/>
-                <a:ea typeface="Montserrat"/>
-                <a:cs typeface="Montserrat"/>
-              </a:rPr>
-              <a:t>HAPPENS</a:t>
+              <a:t>PORTABILITY</a:t>
             </a:r>
           </a:p>
         </p:txBody>
@@ -6082,7 +6080,7 @@
         </p:nvSpPr>
         <p:spPr>
           <a:xfrm>
-            <a:off x="1016000" y="4356100"/>
+            <a:off x="1016000" y="4038600"/>
             <a:ext cx="1651000" cy="25400"/>
           </a:xfrm>
           <a:prstGeom prst="rect">
@@ -6126,8 +6124,8 @@
         </p:nvSpPr>
         <p:spPr>
           <a:xfrm>
-            <a:off x="1016000" y="4711700"/>
-            <a:ext cx="5715000" cy="603250"/>
+            <a:off x="1016000" y="4445000"/>
+            <a:ext cx="5715000" cy="317500"/>
           </a:xfrm>
           <a:prstGeom prst="rect">
             <a:avLst/>
@@ -6142,31 +6140,19 @@
           <a:p>
             <a:pPr algn="l">
               <a:lnSpc>
-                <a:spcPct val="128000"/>
+                <a:spcPct val="130000"/>
               </a:lnSpc>
             </a:pPr>
             <a:r>
-              <a:rPr sz="1700" b="0" i="0">
+              <a:rPr sz="1600" b="1" i="0" spc="60">
                 <a:solidFill>
                   <a:srgbClr val="8E9CB2"/>
                 </a:solidFill>
-                <a:latin typeface="DM Sans"/>
-                <a:ea typeface="DM Sans"/>
-                <a:cs typeface="DM Sans"/>
+                <a:latin typeface="Montserrat"/>
+                <a:ea typeface="Montserrat"/>
+                <a:cs typeface="Montserrat"/>
               </a:rPr>
-              <a:t>Career Portability: Career Pivots,</a:t>
-            </a:r>
-            <a:br/>
-            <a:r>
-              <a:rPr sz="1700" b="0" i="0">
-                <a:solidFill>
-                  <a:srgbClr val="8E9CB2"/>
-                </a:solidFill>
-                <a:latin typeface="DM Sans"/>
-                <a:ea typeface="DM Sans"/>
-                <a:cs typeface="DM Sans"/>
-              </a:rPr>
-              <a:t>Internal Moves &amp; Growth</a:t>
+              <a:t>CAREER PIVOTS  ·  INTERNAL MOVES  ·  GROWTH</a:t>
             </a:r>
           </a:p>
         </p:txBody>

--- a/deliverables/video-8-slides/out/Video_8_Main_Slides.pptx
+++ b/deliverables/video-8-slides/out/Video_8_Main_Slides.pptx
@@ -8143,7 +8143,7 @@
         <p:spPr>
           <a:xfrm>
             <a:off x="1016000" y="5219700"/>
-            <a:ext cx="10160000" cy="355600"/>
+            <a:ext cx="10160000" cy="960120"/>
           </a:xfrm>
           <a:prstGeom prst="rect">
             <a:avLst/>
@@ -8170,7 +8170,31 @@
                 <a:ea typeface="Montserrat"/>
                 <a:cs typeface="Montserrat"/>
               </a:rPr>
-              <a:t>It feels like a competence gap. It is an information gap.</a:t>
+              <a:t>IT CAN FEEL LIKE A COMPETENCE GAP.</a:t>
+            </a:r>
+            <a:br/>
+            <a:r>
+              <a:rPr sz="2000" b="1" i="0">
+                <a:solidFill>
+                  <a:srgbClr val="C9A84C"/>
+                </a:solidFill>
+                <a:latin typeface="Montserrat"/>
+                <a:ea typeface="Montserrat"/>
+                <a:cs typeface="Montserrat"/>
+              </a:rPr>
+              <a:t>SOME CONTEXT CAN BE RESEARCHED.</a:t>
+            </a:r>
+            <a:br/>
+            <a:r>
+              <a:rPr sz="2000" b="1" i="0">
+                <a:solidFill>
+                  <a:srgbClr val="C9A84C"/>
+                </a:solidFill>
+                <a:latin typeface="Montserrat"/>
+                <a:ea typeface="Montserrat"/>
+                <a:cs typeface="Montserrat"/>
+              </a:rPr>
+              <a:t>SOME MUST BE LEARNED THROUGH EXPOSURE.</a:t>
             </a:r>
           </a:p>
         </p:txBody>

--- a/deliverables/video-8-slides/out/Video_8_Main_Slides.pptx
+++ b/deliverables/video-8-slides/out/Video_8_Main_Slides.pptx
@@ -513,29 +513,22 @@
           <a:lstStyle/>
           <a:p>
             <a:r>
-              <a:t>Timing: approximately 0:30.</a:t>
-            </a:r>
-          </a:p>
-          <a:p/>
-          <a:p>
-            <a:r>
-              <a:t>First visual after the hook. Begin full screen on Temidayo; this lands only</a:t>
-            </a:r>
-          </a:p>
-          <a:p>
-            <a:r>
-              <a:t>after the opening distinction and the viewer promise.</a:t>
-            </a:r>
-          </a:p>
-          <a:p/>
-          <a:p>
-            <a:r>
-              <a:t>Reveal the first statement, hold it, then bring in the second. The gap between</a:t>
-            </a:r>
-          </a:p>
-          <a:p>
-            <a:r>
-              <a:t>them is the whole video — do not rush it.</a:t>
+              <a:t>Timing: approximately 0:57.</a:t>
+            </a:r>
+          </a:p>
+          <a:p>
+            <a:r>
+              <a:t>First visual after the hook. Begin full screen on Temidayo; this lands only after the opening distinction and the viewer promise.</a:t>
+            </a:r>
+          </a:p>
+          <a:p>
+            <a:r>
+              <a:t>Reveal the first statement, hold it, then bring in the second. The gap between them is the whole video — do not rush it.</a:t>
+            </a:r>
+          </a:p>
+          <a:p>
+            <a:r>
+              <a:t>v2.2 RESEARCH ALIGNMENT: the video now opens on the audience pain — “direct industry experience required” — held FULL SCREEN on Temidayo before this slide appears. This slide is the answer to that line, so it must not arrive early. The payoff promise follows at about 0:24 and the lived evidence from about 0:34.</a:t>
             </a:r>
           </a:p>
         </p:txBody>
@@ -605,40 +598,27 @@
           <a:lstStyle/>
           <a:p>
             <a:r>
-              <a:t>Timing: approximately 8:35.</a:t>
-            </a:r>
-          </a:p>
-          <a:p/>
+              <a:t>Timing: approximately 10:05.</a:t>
+            </a:r>
+          </a:p>
           <a:p>
             <a:r>
               <a:t>One column per beat, left to right.</a:t>
             </a:r>
           </a:p>
-          <a:p/>
-          <a:p>
-            <a:r>
-              <a:t>Say the finding that makes the exercise worth doing, as an invitation rather</a:t>
-            </a:r>
-          </a:p>
-          <a:p>
-            <a:r>
-              <a:t>than a statistic: they may find the first column is longer than they feared and</a:t>
-            </a:r>
-          </a:p>
-          <a:p>
-            <a:r>
-              <a:t>the third shorter than they assumed.</a:t>
-            </a:r>
-          </a:p>
-          <a:p/>
-          <a:p>
-            <a:r>
-              <a:t>The translation sentence follows this slide and stays spoken, not typeset —</a:t>
-            </a:r>
-          </a:p>
-          <a:p>
-            <a:r>
-              <a:t>the viewer should write it in their own words.</a:t>
+          <a:p>
+            <a:r>
+              <a:t>Say the finding that makes the exercise worth doing, as an invitation rather than a statistic: they may find the first column is longer than they feared and the third shorter than they assumed.</a:t>
+            </a:r>
+          </a:p>
+          <a:p>
+            <a:r>
+              <a:t>The translation sentence follows this slide and stays spoken, not typeset — the viewer should write it in their own words.</a:t>
+            </a:r>
+          </a:p>
+          <a:p>
+            <a:r>
+              <a:t>v2.2 RESEARCH ALIGNMENT: the section now ends on an identity line — this becomes a way of moving rather than a plan for one change, arriving neither as though you were starting from zero nor as though you were already qualified for everything. Let it land before the CTA.</a:t>
             </a:r>
           </a:p>
         </p:txBody>
@@ -708,29 +688,17 @@
           <a:lstStyle/>
           <a:p>
             <a:r>
-              <a:t>Timing: approximately 9:30.</a:t>
-            </a:r>
-          </a:p>
-          <a:p/>
-          <a:p>
-            <a:r>
-              <a:t>One offer only. No Keep the Proof, no Career Decision Evidence Check, no book,</a:t>
-            </a:r>
-          </a:p>
-          <a:p>
-            <a:r>
-              <a:t>on this slide or anywhere in this block.</a:t>
-            </a:r>
-          </a:p>
-          <a:p/>
-          <a:p>
-            <a:r>
-              <a:t>State the limits out loud: the Field Kit does not tell the viewer which</a:t>
-            </a:r>
-          </a:p>
-          <a:p>
-            <a:r>
-              <a:t>industry is hiring and does not replace researching the destination.</a:t>
+              <a:t>Timing: approximately 11:56.</a:t>
+            </a:r>
+          </a:p>
+          <a:p>
+            <a:r>
+              <a:t>One offer only. No Keep the Proof, no Career Decision Evidence Check, no book, on this slide or anywhere in this block.</a:t>
+            </a:r>
+          </a:p>
+          <a:p>
+            <a:r>
+              <a:t>State the limits out loud: the Field Kit does not tell the viewer which industry is hiring and does not replace researching the destination.</a:t>
             </a:r>
           </a:p>
         </p:txBody>
@@ -800,39 +768,17 @@
           <a:lstStyle/>
           <a:p>
             <a:r>
-              <a:t>Timing: approximately 10:05.</a:t>
-            </a:r>
-          </a:p>
-          <a:p/>
-          <a:p>
-            <a:r>
-              <a:t>Everything sits left of x=1130. The right third is reserved for the YouTube</a:t>
-            </a:r>
-          </a:p>
-          <a:p>
-            <a:r>
-              <a:t>end-screen element and must stay empty.</a:t>
-            </a:r>
-          </a:p>
-          <a:p/>
-          <a:p>
-            <a:r>
-              <a:t>No unpublished video is named here or in the spoken line. Set the end-screen</a:t>
-            </a:r>
-          </a:p>
-          <a:p>
-            <a:r>
-              <a:t>video element at upload: route it directly to the next video if that video is</a:t>
-            </a:r>
-          </a:p>
-          <a:p>
-            <a:r>
-              <a:t>already public, otherwise to the public Career Portability playlist. Verify</a:t>
-            </a:r>
-          </a:p>
-          <a:p>
-            <a:r>
-              <a:t>the playlist opens signed out and contains at least one other public video.</a:t>
+              <a:t>Timing: approximately 12:32.</a:t>
+            </a:r>
+          </a:p>
+          <a:p>
+            <a:r>
+              <a:t>Everything sits left of x=1130. The right third is reserved for the YouTube end-screen element and must stay empty.</a:t>
+            </a:r>
+          </a:p>
+          <a:p>
+            <a:r>
+              <a:t>No unpublished video is named here or in the spoken line. Set the end-screen video element at upload: route it directly to the next video if that video is already public, otherwise to the public Career Portability playlist. Verify the playlist opens signed out and contains at least one other public video.</a:t>
             </a:r>
           </a:p>
         </p:txBody>
@@ -902,29 +848,17 @@
           <a:lstStyle/>
           <a:p>
             <a:r>
-              <a:t>Timing: approximately 1:20.</a:t>
-            </a:r>
-          </a:p>
-          <a:p/>
-          <a:p>
-            <a:r>
-              <a:t>Read the six as a list she is walking through, not as a grid to get past.</a:t>
-            </a:r>
-          </a:p>
-          <a:p>
-            <a:r>
-              <a:t>Incentives is the one viewers underestimate — give it a beat.</a:t>
-            </a:r>
-          </a:p>
-          <a:p/>
-          <a:p>
-            <a:r>
-              <a:t>The navy band is the relief line. It reframes the whole problem from</a:t>
-            </a:r>
-          </a:p>
-          <a:p>
-            <a:r>
-              <a:t>competence to information, so let it land before moving on.</a:t>
+              <a:t>Timing: approximately 1:45.</a:t>
+            </a:r>
+          </a:p>
+          <a:p>
+            <a:r>
+              <a:t>Read the six as a list she is walking through, not as a grid to get past. Incentives is the one viewers underestimate — give it a beat.</a:t>
+            </a:r>
+          </a:p>
+          <a:p>
+            <a:r>
+              <a:t>The navy band is the relief line. It reframes the whole problem from competence to information, so let it land before moving on.</a:t>
             </a:r>
           </a:p>
         </p:txBody>
@@ -994,29 +928,17 @@
           <a:lstStyle/>
           <a:p>
             <a:r>
-              <a:t>Timing: approximately 2:15.</a:t>
-            </a:r>
-          </a:p>
-          <a:p/>
-          <a:p>
-            <a:r>
-              <a:t>One row per beat. This is the spine of the video: slides 4, 5 and 6 open each</a:t>
-            </a:r>
-          </a:p>
-          <a:p>
-            <a:r>
-              <a:t>of the three in turn.</a:t>
-            </a:r>
-          </a:p>
-          <a:p/>
-          <a:p>
-            <a:r>
-              <a:t>The reason to separate them is that they have different remedies. Say that</a:t>
-            </a:r>
-          </a:p>
-          <a:p>
-            <a:r>
-              <a:t>line here rather than saving it — it is what makes the slide useful.</a:t>
+              <a:t>Timing: approximately 2:36.</a:t>
+            </a:r>
+          </a:p>
+          <a:p>
+            <a:r>
+              <a:t>One row per beat. This is the spine of the video: slides 4, 5 and 6 open each of the three in turn.</a:t>
+            </a:r>
+          </a:p>
+          <a:p>
+            <a:r>
+              <a:t>The reason to separate them is that they have different remedies. Say that line here rather than saving it — it is what makes the slide useful.</a:t>
             </a:r>
           </a:p>
         </p:txBody>
@@ -1086,21 +1008,14 @@
           <a:lstStyle/>
           <a:p>
             <a:r>
-              <a:t>Timing: approximately 2:50.</a:t>
-            </a:r>
-          </a:p>
-          <a:p/>
-          <a:p>
-            <a:r>
-              <a:t>Concrete examples, not adjectives. Adaptable, strategic and fast learner are</a:t>
-            </a:r>
-          </a:p>
-          <a:p>
-            <a:r>
-              <a:t>explicitly rejected later — do not let them in here.</a:t>
-            </a:r>
-          </a:p>
-          <a:p/>
+              <a:t>Timing: approximately 2:48.</a:t>
+            </a:r>
+          </a:p>
+          <a:p>
+            <a:r>
+              <a:t>Concrete examples, not adjectives. Adaptable, strategic and fast learner are explicitly rejected later — do not let them in here.</a:t>
+            </a:r>
+          </a:p>
           <a:p>
             <a:r>
               <a:t>Invite the viewer to add two of their own before advancing.</a:t>
@@ -1173,29 +1088,17 @@
           <a:lstStyle/>
           <a:p>
             <a:r>
-              <a:t>Timing: approximately 3:25.</a:t>
-            </a:r>
-          </a:p>
-          <a:p/>
-          <a:p>
-            <a:r>
-              <a:t>The last line is the reassurance the viewer came for, so deliver it level</a:t>
-            </a:r>
-          </a:p>
-          <a:p>
-            <a:r>
-              <a:t>rather than warmly — it is a finding, not comfort.</a:t>
-            </a:r>
-          </a:p>
-          <a:p/>
-          <a:p>
-            <a:r>
-              <a:t>Do not promise the gap closes quickly. Say it closes faster than expected when</a:t>
-            </a:r>
-          </a:p>
-          <a:p>
-            <a:r>
-              <a:t>someone is deliberate about it.</a:t>
+              <a:t>Timing: approximately 3:36.</a:t>
+            </a:r>
+          </a:p>
+          <a:p>
+            <a:r>
+              <a:t>The last line is the reassurance the viewer came for, so deliver it level rather than warmly — it is a finding, not comfort.</a:t>
+            </a:r>
+          </a:p>
+          <a:p>
+            <a:r>
+              <a:t>Do not promise the gap closes quickly. Say it closes faster than expected when someone is deliberate about it.</a:t>
             </a:r>
           </a:p>
         </p:txBody>
@@ -1265,34 +1168,22 @@
           <a:lstStyle/>
           <a:p>
             <a:r>
-              <a:t>Timing: approximately 4:05.</a:t>
-            </a:r>
-          </a:p>
-          <a:p/>
-          <a:p>
-            <a:r>
-              <a:t>One state, no build. The three cases are more useful read together than</a:t>
-            </a:r>
-          </a:p>
-          <a:p>
-            <a:r>
-              <a:t>revealed one at a time.</a:t>
-            </a:r>
-          </a:p>
-          <a:p/>
-          <a:p>
-            <a:r>
-              <a:t>The third case is the one that saves the viewer money and months. Say it</a:t>
-            </a:r>
-          </a:p>
-          <a:p>
-            <a:r>
-              <a:t>plainly and without mockery — chasing a credential is a reasonable response to</a:t>
-            </a:r>
-          </a:p>
-          <a:p>
-            <a:r>
-              <a:t>feeling stuck.</a:t>
+              <a:t>Timing: approximately 4:29.</a:t>
+            </a:r>
+          </a:p>
+          <a:p>
+            <a:r>
+              <a:t>One state, no build. The three cases are more useful read together than revealed one at a time.</a:t>
+            </a:r>
+          </a:p>
+          <a:p>
+            <a:r>
+              <a:t>The third case is the one that saves the viewer money and months. Say it plainly and without mockery — chasing a credential is a reasonable response to feeling stuck.</a:t>
+            </a:r>
+          </a:p>
+          <a:p>
+            <a:r>
+              <a:t>v2.2 RESEARCH ALIGNMENT: the spoken section now closes by interpreting the job-ad phrase itself. “Direct industry experience required” sometimes points at something real — regulation, domain knowledge, a licence, decisions where being wrong carries real consequences — and sometimes it is shorthand for hiring risk. The viewer is NOT told to ignore it either way; they are told to ask what the employer is trying not to get wrong. The three cases already on this slide carry that distinction, so the slide does not change.</a:t>
             </a:r>
           </a:p>
         </p:txBody>
@@ -1362,29 +1253,17 @@
           <a:lstStyle/>
           <a:p>
             <a:r>
-              <a:t>Timing: approximately 4:45.</a:t>
-            </a:r>
-          </a:p>
-          <a:p/>
-          <a:p>
-            <a:r>
-              <a:t>The direction of travel is the point. Most viewers start from their own</a:t>
-            </a:r>
-          </a:p>
-          <a:p>
-            <a:r>
-              <a:t>history and hope it matches; this reverses it.</a:t>
-            </a:r>
-          </a:p>
-          <a:p/>
-          <a:p>
-            <a:r>
-              <a:t>Name the real sources out loud — trade press, earnings calls, regulator</a:t>
-            </a:r>
-          </a:p>
-          <a:p>
-            <a:r>
-              <a:t>commentary, and how job descriptions read when a team is frustrated.</a:t>
+              <a:t>Timing: approximately 6:07.</a:t>
+            </a:r>
+          </a:p>
+          <a:p>
+            <a:r>
+              <a:t>The direction of travel is the point. Most viewers start from their own history and hope it matches; this reverses it.</a:t>
+            </a:r>
+          </a:p>
+          <a:p>
+            <a:r>
+              <a:t>Name the real sources out loud — trade press, earnings calls, regulator commentary, and how job descriptions read when a team is frustrated.</a:t>
             </a:r>
           </a:p>
         </p:txBody>
@@ -1454,29 +1333,17 @@
           <a:lstStyle/>
           <a:p>
             <a:r>
-              <a:t>Timing: approximately 5:40.</a:t>
-            </a:r>
-          </a:p>
-          <a:p/>
-          <a:p>
-            <a:r>
-              <a:t>Read the three adjectives flatly. They are not being mocked; they are being</a:t>
-            </a:r>
-          </a:p>
-          <a:p>
-            <a:r>
-              <a:t>shown to carry no information.</a:t>
-            </a:r>
-          </a:p>
-          <a:p/>
-          <a:p>
-            <a:r>
-              <a:t>Follow immediately with the honest limit: managing a regulated programme</a:t>
-            </a:r>
-          </a:p>
-          <a:p>
-            <a:r>
-              <a:t>transfers, knowing how a specific regulator behaves does not.</a:t>
+              <a:t>Timing: approximately 7:03.</a:t>
+            </a:r>
+          </a:p>
+          <a:p>
+            <a:r>
+              <a:t>Read the three adjectives flatly. They are not being mocked; they are being shown to carry no information.</a:t>
+            </a:r>
+          </a:p>
+          <a:p>
+            <a:r>
+              <a:t>Follow immediately with the honest limit: managing a regulated programme transfers, knowing how a specific regulator behaves does not.</a:t>
             </a:r>
           </a:p>
         </p:txBody>
@@ -1546,34 +1413,22 @@
           <a:lstStyle/>
           <a:p>
             <a:r>
-              <a:t>Timing: approximately 6:20.</a:t>
-            </a:r>
-          </a:p>
-          <a:p/>
-          <a:p>
-            <a:r>
-              <a:t>One band per beat. None of these is invented experience, and that boundary is</a:t>
-            </a:r>
-          </a:p>
-          <a:p>
-            <a:r>
-              <a:t>stated out loud rather than implied.</a:t>
-            </a:r>
-          </a:p>
-          <a:p/>
-          <a:p>
-            <a:r>
-              <a:t>Research only counts once it has become a point of view. Make that distinction</a:t>
-            </a:r>
-          </a:p>
-          <a:p>
-            <a:r>
-              <a:t>audible — it is the difference between reading about a sector and having</a:t>
-            </a:r>
-          </a:p>
-          <a:p>
-            <a:r>
-              <a:t>something to say about it.</a:t>
+              <a:t>Timing: approximately 8:03.</a:t>
+            </a:r>
+          </a:p>
+          <a:p>
+            <a:r>
+              <a:t>One band per beat. None of these is invented experience, and that boundary is stated out loud rather than implied.</a:t>
+            </a:r>
+          </a:p>
+          <a:p>
+            <a:r>
+              <a:t>Research only counts once it has become a point of view. Make that distinction audible — it is the difference between reading about a sector and having something to say about it.</a:t>
+            </a:r>
+          </a:p>
+          <a:p>
+            <a:r>
+              <a:t>v2.2 RESEARCH ALIGNMENT: before the bridge-evidence list, the script now sorts the gap into four parts — what I can already do with evidence, what context I could reasonably learn, what is a genuine gap, and what this employer would need to see to trust the overlap. That fourth part is the employer-legibility layer and is the one most people skip. Keep it; it is what stops the section becoming confidence theater.</a:t>
             </a:r>
           </a:p>
         </p:txBody>

--- a/deliverables/video-8-slides/out/Video_8_Main_Slides.pptx
+++ b/deliverables/video-8-slides/out/Video_8_Main_Slides.pptx
@@ -598,7 +598,7 @@
           <a:lstStyle/>
           <a:p>
             <a:r>
-              <a:t>Timing: approximately 10:05.</a:t>
+              <a:t>Timing: approximately 10:12.</a:t>
             </a:r>
           </a:p>
           <a:p>
@@ -688,7 +688,7 @@
           <a:lstStyle/>
           <a:p>
             <a:r>
-              <a:t>Timing: approximately 11:56.</a:t>
+              <a:t>Timing: approximately 12:02.</a:t>
             </a:r>
           </a:p>
           <a:p>
@@ -768,7 +768,7 @@
           <a:lstStyle/>
           <a:p>
             <a:r>
-              <a:t>Timing: approximately 12:32.</a:t>
+              <a:t>Timing: approximately 12:38.</a:t>
             </a:r>
           </a:p>
           <a:p>
@@ -861,6 +861,11 @@
               <a:t>The navy band is the relief line. It reframes the whole problem from competence to information, so let it land before moving on.</a:t>
             </a:r>
           </a:p>
+          <a:p>
+            <a:r>
+              <a:t>v2.2.1 PRECISION CORRECTION: the payoff now reads NOT EVERY DIFFERENCE IS A CAPABILITY GAP. / MUCH OF IT IS CONTEXT., with the sub-line “Some can be researched. Some must be learned through exposure.” The earlier wording (“none of that is your competence… and context is learnable”) was too absolute against the research-aligned script, because regulation and risk can be genuine domain or exposure requirements. The list and the visual design are unchanged.</a:t>
+            </a:r>
+          </a:p>
         </p:txBody>
       </p:sp>
       <p:sp>
@@ -1021,6 +1026,11 @@
               <a:t>Invite the viewer to add two of their own before advancing.</a:t>
             </a:r>
           </a:p>
+          <a:p>
+            <a:r>
+              <a:t>v2.2.1 PRECISION CORRECTION: the closing line now reads THESE FORMS OF JUDGMENT CAN TRAVEL — / WHEN THE NEW CONTEXT NEEDS THEM., replacing “None of these belong to an industry.” The point is that judgment does not transfer automatically regardless of whether the destination needs it. Two lines, same position, same type.</a:t>
+            </a:r>
+          </a:p>
         </p:txBody>
       </p:sp>
       <p:sp>
@@ -1183,7 +1193,7 @@
           </a:p>
           <a:p>
             <a:r>
-              <a:t>v2.2 RESEARCH ALIGNMENT: the spoken section now closes by interpreting the job-ad phrase itself. “Direct industry experience required” sometimes points at something real — regulation, domain knowledge, a licence, decisions where being wrong carries real consequences — and sometimes it is shorthand for hiring risk. The viewer is NOT told to ignore it either way; they are told to ask what the employer is trying not to get wrong. The three cases already on this slide carry that distinction, so the slide does not change.</a:t>
+              <a:t>v2.2 RESEARCH ALIGNMENT: the spoken section now closes by interpreting the job-ad phrase itself. “Direct industry experience required” sometimes points at something real — regulation, domain knowledge, a license, decisions where being wrong carries real consequences — and sometimes it is shorthand for hiring risk. The viewer is NOT told to ignore it either way; they are told to ask what the employer is trying not to get wrong. The three cases already on this slide carry that distinction, so the slide does not change.</a:t>
             </a:r>
           </a:p>
         </p:txBody>
@@ -1253,7 +1263,7 @@
           <a:lstStyle/>
           <a:p>
             <a:r>
-              <a:t>Timing: approximately 6:07.</a:t>
+              <a:t>Timing: approximately 6:14.</a:t>
             </a:r>
           </a:p>
           <a:p>
@@ -1333,7 +1343,7 @@
           <a:lstStyle/>
           <a:p>
             <a:r>
-              <a:t>Timing: approximately 7:03.</a:t>
+              <a:t>Timing: approximately 7:10.</a:t>
             </a:r>
           </a:p>
           <a:p>
@@ -1413,7 +1423,7 @@
           <a:lstStyle/>
           <a:p>
             <a:r>
-              <a:t>Timing: approximately 8:03.</a:t>
+              <a:t>Timing: approximately 8:09.</a:t>
             </a:r>
           </a:p>
           <a:p>
@@ -6669,7 +6679,7 @@
                 <a:ea typeface="Montserrat"/>
                 <a:cs typeface="Montserrat"/>
               </a:rPr>
-              <a:t>NONE OF THAT IS YOUR COMPETENCE.</a:t>
+              <a:t>NOT EVERY DIFFERENCE IS A CAPABILITY GAP.</a:t>
             </a:r>
           </a:p>
           <a:p>
@@ -6690,7 +6700,7 @@
                 <a:ea typeface="Montserrat"/>
                 <a:cs typeface="Montserrat"/>
               </a:rPr>
-              <a:t>ALL OF IT IS CONTEXT.</a:t>
+              <a:t>MUCH OF IT IS CONTEXT.</a:t>
             </a:r>
           </a:p>
         </p:txBody>
@@ -6775,7 +6785,7 @@
                 <a:ea typeface="DM Sans"/>
                 <a:cs typeface="DM Sans"/>
               </a:rPr>
-              <a:t>And context is learnable.</a:t>
+              <a:t>Some can be researched. Some must be learned through exposure.</a:t>
             </a:r>
           </a:p>
         </p:txBody>
@@ -7684,7 +7694,28 @@
                 <a:ea typeface="Montserrat"/>
                 <a:cs typeface="Montserrat"/>
               </a:rPr>
-              <a:t>None of these belong to an industry.</a:t>
+              <a:t>THESE FORMS OF JUDGMENT CAN TRAVEL —</a:t>
+            </a:r>
+            <a:br>
+              <a:rPr sz="2000" b="1" i="0">
+                <a:solidFill>
+                  <a:srgbClr val="0F2346"/>
+                </a:solidFill>
+                <a:latin typeface="Montserrat"/>
+                <a:ea typeface="Montserrat"/>
+                <a:cs typeface="Montserrat"/>
+              </a:rPr>
+            </a:br>
+            <a:r>
+              <a:rPr sz="2000" b="1" i="0">
+                <a:solidFill>
+                  <a:srgbClr val="0F2346"/>
+                </a:solidFill>
+                <a:latin typeface="Montserrat"/>
+                <a:ea typeface="Montserrat"/>
+                <a:cs typeface="Montserrat"/>
+              </a:rPr>
+              <a:t>WHEN THE NEW CONTEXT NEEDS THEM.</a:t>
             </a:r>
           </a:p>
         </p:txBody>

--- a/deliverables/video-8-slides/out/Video_8_Main_Slides.pptx
+++ b/deliverables/video-8-slides/out/Video_8_Main_Slides.pptx
@@ -1353,7 +1353,7 @@
           </a:p>
           <a:p>
             <a:r>
-              <a:t>Follow immediately with the honest limit: managing a regulated programme transfers, knowing how a specific regulator behaves does not.</a:t>
+              <a:t>Follow immediately with the honest limit: managing a regulated program transfers, knowing how a specific regulator behaves does not.</a:t>
             </a:r>
           </a:p>
         </p:txBody>
@@ -8857,7 +8857,7 @@
                 <a:ea typeface="DM Sans"/>
                 <a:cs typeface="DM Sans"/>
               </a:rPr>
-              <a:t>Which patterns do you already recognise early?</a:t>
+              <a:t>Which patterns do you already recognize early?</a:t>
             </a:r>
           </a:p>
           <a:p>
